--- a/산출물/실전반/이론_오프라인/03회차/실전반_오프라인_03회차.pptx
+++ b/산출물/실전반/이론_오프라인/03회차/실전반_오프라인_03회차.pptx
@@ -546,11 +546,6 @@
           </a:p>
           <a:p>
             <a:r>
-              <a:t>· 이론은 온라인 과정과 같은 교재의 인제스천 장에서 오늘 실습에 쓰는 것만</a:t>
-            </a:r>
-          </a:p>
-          <a:p>
-            <a:r>
               <a:t>[다음] 학습목표</a:t>
             </a:r>
           </a:p>
@@ -941,7 +936,7 @@
           </a:p>
           <a:p>
             <a:r>
-              <a:t>· 실습 기록의 채택 · 수정 · 제외 · 보류가 이 단원의 판단</a:t>
+              <a:t>· 오류 넷과 실제 기록 → 인용 대조와 사람 검토 → 후보마다 채택 · 수정 · 제외 · 보류를 가르는 판단</a:t>
             </a:r>
           </a:p>
           <a:p>
@@ -1151,7 +1146,7 @@
           </a:p>
           <a:p>
             <a:r>
-              <a:t>· 실습 추출 기능은 후보마다 채택 · 수정 · 제외 · 보류를 기록</a:t>
+              <a:t>· 검토 결정: 후보마다 채택 · 수정 · 제외 · 보류를 기록</a:t>
             </a:r>
           </a:p>
           <a:p>
@@ -1331,7 +1326,7 @@
           </a:p>
           <a:p>
             <a:r>
-              <a:t>· 한 번에 적재: 한 트랜잭션, 하나라도 실패하면 전체 취소 = 원자성(절차만 들어가고 금지 조건이 빠진 상태가 더 위험)</a:t>
+              <a:t>· 한 번에 적재: 한 트랜잭션(트랜잭션 = 여러 쓰기를 하나로 묶어 전부 반영하거나 전부 취소하는 단위), 하나라도 실패하면 전체 취소 = 원자성(절차만 들어가고 금지 조건이 빠진 상태가 더 위험)</a:t>
             </a:r>
           </a:p>
           <a:p>
@@ -1636,7 +1631,7 @@
           </a:p>
           <a:p>
             <a:r>
-              <a:t>· 2 추출과 매핑: 원문 ID · 절 · 판본을 보존하는 까닭, LLM 후보를 등록된 대상에 잇기(추출 기능의 바탕)</a:t>
+              <a:t>· 2 추출과 매핑: 원문 ID · 절 · 판본을 보존하는 까닭, LLM 후보를 등록된 대상에 잇기</a:t>
             </a:r>
           </a:p>
           <a:p>
@@ -1646,7 +1641,7 @@
           </a:p>
           <a:p>
             <a:r>
-              <a:t>· 4 승인 지식의 재사용: 승인한 것만 넣고 출처를 따라 되짚기, 공급 정보와 작업 조건으로 답할 수 있는 것과 없는 것(적재 · 작업 확인 카드의 바탕)</a:t>
+              <a:t>· 4 승인 지식의 재사용: 승인한 것만 넣고 출처를 따라 되짚기, 공급 정보와 작업 조건으로 답할 수 있는 것과 없는 것</a:t>
             </a:r>
           </a:p>
           <a:p>
@@ -3301,7 +3296,7 @@
           </a:p>
           <a:p>
             <a:r>
-              <a:t>· 실습에서 선택한 작업의 준비 · 금지 · 완료 조건과 근거 절을 뽑는 기능을 만든다</a:t>
+              <a:t>· 고정한 원문과 구조 → 추출 지시문과 출력 → 등록된 대상에 매핑 → 가리킬 입력 데이터가 없는 금지 문장</a:t>
             </a:r>
           </a:p>
           <a:p>
